--- a/yunqi-2026-agenda-201/docs/洞察一页-07-时空智能 Infra：感-算-决一体化.pptx
+++ b/yunqi-2026-agenda-201/docs/洞察一页-07-时空智能 Infra：感-算-决一体化.pptx
@@ -3141,7 +3141,7 @@
         <p:spPr>
           <a:xfrm>
             <a:off x="0" y="0"/>
-            <a:ext cx="12191695" cy="1051560"/>
+            <a:ext cx="12191695" cy="1097280"/>
           </a:xfrm>
           <a:prstGeom prst="rect">
             <a:avLst/>
@@ -3183,8 +3183,8 @@
         </p:nvSpPr>
         <p:spPr>
           <a:xfrm>
-            <a:off x="365760" y="146304"/>
-            <a:ext cx="11430000" cy="274320"/>
+            <a:off x="320040" y="91440"/>
+            <a:ext cx="11521440" cy="237744"/>
           </a:xfrm>
           <a:prstGeom prst="rect">
             <a:avLst/>
@@ -3199,7 +3199,7 @@
           <a:p>
             <a:pPr algn="l"/>
             <a:r>
-              <a:rPr sz="1300" b="0">
+              <a:rPr sz="1200" b="0">
                 <a:solidFill>
                   <a:srgbClr val="6B6B6B"/>
                 </a:solidFill>
@@ -3219,8 +3219,8 @@
         </p:nvSpPr>
         <p:spPr>
           <a:xfrm>
-            <a:off x="365760" y="420624"/>
-            <a:ext cx="11430000" cy="502920"/>
+            <a:off x="320040" y="347472"/>
+            <a:ext cx="11521440" cy="658368"/>
           </a:xfrm>
           <a:prstGeom prst="rect">
             <a:avLst/>
@@ -3235,14 +3235,14 @@
           <a:p>
             <a:pPr algn="l"/>
             <a:r>
-              <a:rPr sz="2000" b="1">
+              <a:rPr sz="1600" b="1">
                 <a:solidFill>
                   <a:srgbClr val="1A1A1A"/>
                 </a:solidFill>
                 <a:latin typeface="Microsoft YaHei"/>
                 <a:ea typeface="Microsoft YaHei"/>
               </a:rPr>
-              <a:t>洞察：时空智能是「数据飞轮 + 世界模型 + 行业决策」组合，HCS 要同时补 EO 数据面、异构训…</a:t>
+              <a:t>洞察：时空智能是「数据飞轮 + 世界模型 + 行业决策」组合，HCS 要同时补 EO 数据面、异构训推与行业 SLA 方案包。</a:t>
             </a:r>
           </a:p>
         </p:txBody>
@@ -3255,8 +3255,8 @@
         </p:nvSpPr>
         <p:spPr>
           <a:xfrm>
-            <a:off x="320040" y="1207008"/>
-            <a:ext cx="11521440" cy="502920"/>
+            <a:off x="274320" y="1207008"/>
+            <a:ext cx="11612880" cy="749808"/>
           </a:xfrm>
           <a:prstGeom prst="rect">
             <a:avLst/>
@@ -3300,8 +3300,8 @@
         </p:nvSpPr>
         <p:spPr>
           <a:xfrm>
-            <a:off x="457200" y="1298448"/>
-            <a:ext cx="11247120" cy="365760"/>
+            <a:off x="411480" y="1261872"/>
+            <a:ext cx="11338560" cy="640080"/>
           </a:xfrm>
           <a:prstGeom prst="rect">
             <a:avLst/>
@@ -3316,14 +3316,14 @@
           <a:p>
             <a:pPr algn="l"/>
             <a:r>
-              <a:rPr sz="1300" b="1">
+              <a:rPr sz="1200" b="1">
                 <a:solidFill>
                   <a:srgbClr val="1A1A1A"/>
                 </a:solidFill>
                 <a:latin typeface="Microsoft YaHei"/>
                 <a:ea typeface="Microsoft YaHei"/>
               </a:rPr>
-              <a:t>一句话判断：洞察时空提出时空智能 Infra 的「感-算-决」一体化架构：从 LLM「会说话」跃迁到物理世界模型「懂世界」，以卫星/多源 EO 数据作为 AI 与物理世界对齐的关键反馈入口。基于 ACK 云原生 AI 套件构建卫星…</a:t>
+              <a:t>一句话判断：洞察时空提出时空智能 Infra 的「感-算-决」一体化架构：从 LLM「会说话」跃迁到物理世界模型「懂世界」，以卫星/多源 EO 数据作为 AI 与物理世界对齐的关键反馈入口。基于 ACK 云原生 AI 套件构建卫星任务调度、时空数据湖、算法与预测决策平台，落地气象、新能源功率与电力现货等行业场景，并以 API/MCP/Agent 开放产业生态。</a:t>
             </a:r>
           </a:p>
         </p:txBody>
@@ -3336,8 +3336,8 @@
         </p:nvSpPr>
         <p:spPr>
           <a:xfrm>
-            <a:off x="320040" y="1874519"/>
-            <a:ext cx="3703320" cy="2606040"/>
+            <a:off x="274320" y="2084831"/>
+            <a:ext cx="3749039" cy="2267712"/>
           </a:xfrm>
           <a:prstGeom prst="rect">
             <a:avLst/>
@@ -3381,8 +3381,8 @@
         </p:nvSpPr>
         <p:spPr>
           <a:xfrm>
-            <a:off x="457200" y="2011679"/>
-            <a:ext cx="3429000" cy="320040"/>
+            <a:off x="402336" y="2176271"/>
+            <a:ext cx="3493007" cy="292608"/>
           </a:xfrm>
           <a:prstGeom prst="rect">
             <a:avLst/>
@@ -3397,14 +3397,14 @@
           <a:p>
             <a:pPr algn="l"/>
             <a:r>
-              <a:rPr sz="1500" b="1">
+              <a:rPr sz="1400" b="1">
                 <a:solidFill>
                   <a:srgbClr val="8B1A2B"/>
                 </a:solidFill>
                 <a:latin typeface="Microsoft YaHei"/>
                 <a:ea typeface="Microsoft YaHei"/>
               </a:rPr>
-              <a:t>01  时空智能 Infra：感-算-…</a:t>
+              <a:t>01  感-算-决一体化定位</a:t>
             </a:r>
           </a:p>
         </p:txBody>
@@ -3417,8 +3417,8 @@
         </p:nvSpPr>
         <p:spPr>
           <a:xfrm>
-            <a:off x="484632" y="2377439"/>
-            <a:ext cx="3374136" cy="1965960"/>
+            <a:off x="402336" y="2487167"/>
+            <a:ext cx="3493007" cy="1764792"/>
           </a:xfrm>
           <a:prstGeom prst="rect">
             <a:avLst/>
@@ -3433,28 +3433,45 @@
           <a:p>
             <a:pPr algn="l">
               <a:spcAft>
-                <a:spcPts val="400"/>
+                <a:spcPts val="200"/>
               </a:spcAft>
             </a:pPr>
             <a:r>
-              <a:rPr sz="1200" b="1">
+              <a:rPr sz="1100" b="1">
                 <a:solidFill>
                   <a:srgbClr val="1A1A1A"/>
                 </a:solidFill>
                 <a:latin typeface="Microsoft YaHei"/>
                 <a:ea typeface="Microsoft YaHei"/>
               </a:rPr>
-              <a:t>议题定位：构建感知（卫星/多源数据）—计算（时空数据湖与训练推理）—决策（预测/推…</a:t>
+              <a:t>HCS 若服务智慧城市/能源/应急类客户，需在容器 AI 平台之上显式规划「时空数据接入 → 训练推理 → 决策服务」闭环产品线</a:t>
             </a:r>
           </a:p>
           <a:p>
             <a:pPr algn="l">
               <a:spcAft>
-                <a:spcPts val="400"/>
+                <a:spcPts val="200"/>
               </a:spcAft>
             </a:pPr>
             <a:r>
-              <a:rPr sz="1200" b="0">
+              <a:rPr sz="1100" b="0">
+                <a:solidFill>
+                  <a:srgbClr val="4A4A4A"/>
+                </a:solidFill>
+                <a:latin typeface="Microsoft YaHei"/>
+                <a:ea typeface="Microsoft YaHei"/>
+              </a:rPr>
+              <a:t>• 议题定位：构建感知（卫星/多源数据）—计算（时空数据湖与训练推理）—决策（预测/推演服务）一体化技术架构。</a:t>
+            </a:r>
+          </a:p>
+          <a:p>
+            <a:pPr algn="l">
+              <a:spcAft>
+                <a:spcPts val="200"/>
+              </a:spcAft>
+            </a:pPr>
+            <a:r>
+              <a:rPr sz="1100" b="0">
                 <a:solidFill>
                   <a:srgbClr val="4A4A4A"/>
                 </a:solidFill>
@@ -3474,8 +3491,8 @@
         </p:nvSpPr>
         <p:spPr>
           <a:xfrm>
-            <a:off x="4224528" y="1874519"/>
-            <a:ext cx="3703320" cy="2606040"/>
+            <a:off x="4187951" y="2084831"/>
+            <a:ext cx="3749039" cy="2267712"/>
           </a:xfrm>
           <a:prstGeom prst="rect">
             <a:avLst/>
@@ -3519,8 +3536,8 @@
         </p:nvSpPr>
         <p:spPr>
           <a:xfrm>
-            <a:off x="4361688" y="2011679"/>
-            <a:ext cx="3429000" cy="320040"/>
+            <a:off x="4315967" y="2176271"/>
+            <a:ext cx="3493007" cy="292608"/>
           </a:xfrm>
           <a:prstGeom prst="rect">
             <a:avLst/>
@@ -3535,14 +3552,14 @@
           <a:p>
             <a:pPr algn="l"/>
             <a:r>
-              <a:rPr sz="1500" b="1">
+              <a:rPr sz="1400" b="1">
                 <a:solidFill>
                   <a:srgbClr val="8B1A2B"/>
                 </a:solidFill>
                 <a:latin typeface="Microsoft YaHei"/>
                 <a:ea typeface="Microsoft YaHei"/>
               </a:rPr>
-              <a:t>02  从 LLM 到物理世界模型（W…</a:t>
+              <a:t>02  从 LLM 到物理世界模型（WM）的能力跃迁</a:t>
             </a:r>
           </a:p>
         </p:txBody>
@@ -3555,8 +3572,8 @@
         </p:nvSpPr>
         <p:spPr>
           <a:xfrm>
-            <a:off x="4389120" y="2377439"/>
-            <a:ext cx="3374136" cy="1965960"/>
+            <a:off x="4315967" y="2487167"/>
+            <a:ext cx="3493007" cy="1764792"/>
           </a:xfrm>
           <a:prstGeom prst="rect">
             <a:avLst/>
@@ -3571,28 +3588,45 @@
           <a:p>
             <a:pPr algn="l">
               <a:spcAft>
-                <a:spcPts val="400"/>
+                <a:spcPts val="200"/>
               </a:spcAft>
             </a:pPr>
             <a:r>
-              <a:rPr sz="1200" b="1">
+              <a:rPr sz="1100" b="1">
                 <a:solidFill>
                   <a:srgbClr val="1A1A1A"/>
                 </a:solidFill>
                 <a:latin typeface="Microsoft YaHei"/>
                 <a:ea typeface="Microsoft YaHei"/>
               </a:rPr>
-              <a:t>对象：LLM 面向人类约定的语言符号；WM 面向客观物理世界。</a:t>
+              <a:t>HCS AI 平台规划应区分「语言智能」与「世界模型/物理智能」两套工作负载画像：后者强调时空演化仿真、因果约束与长周期推演算力</a:t>
             </a:r>
           </a:p>
           <a:p>
             <a:pPr algn="l">
               <a:spcAft>
-                <a:spcPts val="400"/>
+                <a:spcPts val="200"/>
               </a:spcAft>
             </a:pPr>
             <a:r>
-              <a:rPr sz="1200" b="0">
+              <a:rPr sz="1100" b="0">
+                <a:solidFill>
+                  <a:srgbClr val="4A4A4A"/>
+                </a:solidFill>
+                <a:latin typeface="Microsoft YaHei"/>
+                <a:ea typeface="Microsoft YaHei"/>
+              </a:rPr>
+              <a:t>• 对象：LLM 面向人类约定的语言符号；WM 面向客观物理世界。</a:t>
+            </a:r>
+          </a:p>
+          <a:p>
+            <a:pPr algn="l">
+              <a:spcAft>
+                <a:spcPts val="200"/>
+              </a:spcAft>
+            </a:pPr>
+            <a:r>
+              <a:rPr sz="1100" b="0">
                 <a:solidFill>
                   <a:srgbClr val="4A4A4A"/>
                 </a:solidFill>
@@ -3605,18 +3639,18 @@
           <a:p>
             <a:pPr algn="l">
               <a:spcAft>
-                <a:spcPts val="400"/>
+                <a:spcPts val="200"/>
               </a:spcAft>
             </a:pPr>
             <a:r>
-              <a:rPr sz="1200" b="0">
+              <a:rPr sz="1100" b="0">
                 <a:solidFill>
                   <a:srgbClr val="4A4A4A"/>
                 </a:solidFill>
                 <a:latin typeface="Microsoft YaHei"/>
                 <a:ea typeface="Microsoft YaHei"/>
               </a:rPr>
-              <a:t>• 能力：LLM 模仿交流与信息处理；WM 模拟世界、推演未来并驱动智能体行动——「LLM 进入信息世界，WM 进入并作用于真实世界」。</a:t>
+              <a:t>• 能力：LLM 模仿交流与信息处理</a:t>
             </a:r>
           </a:p>
         </p:txBody>
@@ -3629,8 +3663,8 @@
         </p:nvSpPr>
         <p:spPr>
           <a:xfrm>
-            <a:off x="8129016" y="1874519"/>
-            <a:ext cx="3703320" cy="2606040"/>
+            <a:off x="8101582" y="2084831"/>
+            <a:ext cx="3749039" cy="2267712"/>
           </a:xfrm>
           <a:prstGeom prst="rect">
             <a:avLst/>
@@ -3674,8 +3708,8 @@
         </p:nvSpPr>
         <p:spPr>
           <a:xfrm>
-            <a:off x="8266176" y="2011679"/>
-            <a:ext cx="3429000" cy="320040"/>
+            <a:off x="8229598" y="2176271"/>
+            <a:ext cx="3493007" cy="292608"/>
           </a:xfrm>
           <a:prstGeom prst="rect">
             <a:avLst/>
@@ -3690,14 +3724,14 @@
           <a:p>
             <a:pPr algn="l"/>
             <a:r>
-              <a:rPr sz="1500" b="1">
+              <a:rPr sz="1400" b="1">
                 <a:solidFill>
                   <a:srgbClr val="8B1A2B"/>
                 </a:solidFill>
                 <a:latin typeface="Microsoft YaHei"/>
                 <a:ea typeface="Microsoft YaHei"/>
               </a:rPr>
-              <a:t>03  大尺度物理世界模型：不止智驾与…</a:t>
+              <a:t>03  不止智驾与具身</a:t>
             </a:r>
           </a:p>
         </p:txBody>
@@ -3710,8 +3744,8 @@
         </p:nvSpPr>
         <p:spPr>
           <a:xfrm>
-            <a:off x="8293608" y="2377439"/>
-            <a:ext cx="3374136" cy="1965960"/>
+            <a:off x="8229598" y="2487167"/>
+            <a:ext cx="3493007" cy="1764792"/>
           </a:xfrm>
           <a:prstGeom prst="rect">
             <a:avLst/>
@@ -3726,28 +3760,45 @@
           <a:p>
             <a:pPr algn="l">
               <a:spcAft>
-                <a:spcPts val="400"/>
+                <a:spcPts val="200"/>
               </a:spcAft>
             </a:pPr>
             <a:r>
-              <a:rPr sz="1200" b="1">
+              <a:rPr sz="1100" b="1">
                 <a:solidFill>
                   <a:srgbClr val="1A1A1A"/>
                 </a:solidFill>
                 <a:latin typeface="Microsoft YaHei"/>
                 <a:ea typeface="Microsoft YaHei"/>
               </a:rPr>
-              <a:t>适用系统特征：可观测状态、时空演化、受物理规律与因果约束。</a:t>
+              <a:t>政企与能源客户是时空智能的主战场</a:t>
             </a:r>
           </a:p>
           <a:p>
             <a:pPr algn="l">
               <a:spcAft>
-                <a:spcPts val="400"/>
+                <a:spcPts val="200"/>
               </a:spcAft>
             </a:pPr>
             <a:r>
-              <a:rPr sz="1200" b="0">
+              <a:rPr sz="1100" b="0">
+                <a:solidFill>
+                  <a:srgbClr val="4A4A4A"/>
+                </a:solidFill>
+                <a:latin typeface="Microsoft YaHei"/>
+                <a:ea typeface="Microsoft YaHei"/>
+              </a:rPr>
+              <a:t>• 适用系统特征：可观测状态、时空演化、受物理规律与因果约束。</a:t>
+            </a:r>
+          </a:p>
+          <a:p>
+            <a:pPr algn="l">
+              <a:spcAft>
+                <a:spcPts val="200"/>
+              </a:spcAft>
+            </a:pPr>
+            <a:r>
+              <a:rPr sz="1100" b="0">
                 <a:solidFill>
                   <a:srgbClr val="4A4A4A"/>
                 </a:solidFill>
@@ -3760,11 +3811,11 @@
           <a:p>
             <a:pPr algn="l">
               <a:spcAft>
-                <a:spcPts val="400"/>
+                <a:spcPts val="200"/>
               </a:spcAft>
             </a:pPr>
             <a:r>
-              <a:rPr sz="1200" b="0">
+              <a:rPr sz="1100" b="0">
                 <a:solidFill>
                   <a:srgbClr val="4A4A4A"/>
                 </a:solidFill>
@@ -3784,8 +3835,8 @@
         </p:nvSpPr>
         <p:spPr>
           <a:xfrm>
-            <a:off x="320040" y="4617720"/>
-            <a:ext cx="7315200" cy="256032"/>
+            <a:off x="274320" y="4553712"/>
+            <a:ext cx="7315200" cy="237744"/>
           </a:xfrm>
           <a:prstGeom prst="rect">
             <a:avLst/>
@@ -3800,7 +3851,7 @@
           <a:p>
             <a:pPr algn="l"/>
             <a:r>
-              <a:rPr sz="1400" b="1">
+              <a:rPr sz="1300" b="1">
                 <a:solidFill>
                   <a:srgbClr val="1A1A1A"/>
                 </a:solidFill>
@@ -3820,8 +3871,8 @@
         </p:nvSpPr>
         <p:spPr>
           <a:xfrm>
-            <a:off x="320040" y="4910328"/>
-            <a:ext cx="1847088" cy="868680"/>
+            <a:off x="274320" y="4809744"/>
+            <a:ext cx="1874519" cy="960120"/>
           </a:xfrm>
           <a:prstGeom prst="rect">
             <a:avLst/>
@@ -3865,8 +3916,8 @@
         </p:nvSpPr>
         <p:spPr>
           <a:xfrm>
-            <a:off x="429768" y="4965192"/>
-            <a:ext cx="1664208" cy="201168"/>
+            <a:off x="365760" y="4864608"/>
+            <a:ext cx="1709927" cy="201168"/>
           </a:xfrm>
           <a:prstGeom prst="rect">
             <a:avLst/>
@@ -3888,7 +3939,7 @@
                 <a:latin typeface="Microsoft YaHei"/>
                 <a:ea typeface="Microsoft YaHei"/>
               </a:rPr>
-              <a:t>时空智能 Infra：…</a:t>
+              <a:t>架构口号</a:t>
             </a:r>
           </a:p>
         </p:txBody>
@@ -3901,8 +3952,8 @@
         </p:nvSpPr>
         <p:spPr>
           <a:xfrm>
-            <a:off x="429768" y="5166360"/>
-            <a:ext cx="1664208" cy="237744"/>
+            <a:off x="365760" y="5065776"/>
+            <a:ext cx="1709927" cy="256032"/>
           </a:xfrm>
           <a:prstGeom prst="rect">
             <a:avLst/>
@@ -3924,7 +3975,7 @@
                 <a:latin typeface="Microsoft YaHei"/>
                 <a:ea typeface="Microsoft YaHei"/>
               </a:rPr>
-              <a:t>议题定位：构建感知（卫星/多源…</a:t>
+              <a:t>演讲口径</a:t>
             </a:r>
           </a:p>
         </p:txBody>
@@ -3937,8 +3988,8 @@
         </p:nvSpPr>
         <p:spPr>
           <a:xfrm>
-            <a:off x="429768" y="5413248"/>
-            <a:ext cx="1664208" cy="292608"/>
+            <a:off x="365760" y="5340096"/>
+            <a:ext cx="1709927" cy="365760"/>
           </a:xfrm>
           <a:prstGeom prst="rect">
             <a:avLst/>
@@ -3953,14 +4004,14 @@
           <a:p>
             <a:pPr algn="l"/>
             <a:r>
-              <a:rPr sz="1400" b="1">
+              <a:rPr sz="1200" b="1">
                 <a:solidFill>
                   <a:srgbClr val="8B1A2B"/>
                 </a:solidFill>
                 <a:latin typeface="Microsoft YaHei"/>
                 <a:ea typeface="Microsoft YaHei"/>
               </a:rPr>
-              <a:t>架构口号：感 · 算 · 决一体化</a:t>
+              <a:t>感 · 算 · 决一体化</a:t>
             </a:r>
           </a:p>
         </p:txBody>
@@ -3973,8 +4024,8 @@
         </p:nvSpPr>
         <p:spPr>
           <a:xfrm>
-            <a:off x="2276856" y="4910328"/>
-            <a:ext cx="1847088" cy="868680"/>
+            <a:off x="2240279" y="4809744"/>
+            <a:ext cx="1874519" cy="960120"/>
           </a:xfrm>
           <a:prstGeom prst="rect">
             <a:avLst/>
@@ -4018,8 +4069,8 @@
         </p:nvSpPr>
         <p:spPr>
           <a:xfrm>
-            <a:off x="2386584" y="4965192"/>
-            <a:ext cx="1664208" cy="201168"/>
+            <a:off x="2331719" y="4864608"/>
+            <a:ext cx="1709927" cy="201168"/>
           </a:xfrm>
           <a:prstGeom prst="rect">
             <a:avLst/>
@@ -4041,7 +4092,7 @@
                 <a:latin typeface="Microsoft YaHei"/>
                 <a:ea typeface="Microsoft YaHei"/>
               </a:rPr>
-              <a:t>从 LLM 到物理世界…</a:t>
+              <a:t>跃迁轴</a:t>
             </a:r>
           </a:p>
         </p:txBody>
@@ -4054,8 +4105,8 @@
         </p:nvSpPr>
         <p:spPr>
           <a:xfrm>
-            <a:off x="2386584" y="5166360"/>
-            <a:ext cx="1664208" cy="237744"/>
+            <a:off x="2331719" y="5065776"/>
+            <a:ext cx="1709927" cy="256032"/>
           </a:xfrm>
           <a:prstGeom prst="rect">
             <a:avLst/>
@@ -4077,7 +4128,7 @@
                 <a:latin typeface="Microsoft YaHei"/>
                 <a:ea typeface="Microsoft YaHei"/>
               </a:rPr>
-              <a:t>对象：LLM 面向人类约定的语…</a:t>
+              <a:t>跃迁轴：LLM</a:t>
             </a:r>
           </a:p>
         </p:txBody>
@@ -4090,8 +4141,8 @@
         </p:nvSpPr>
         <p:spPr>
           <a:xfrm>
-            <a:off x="2386584" y="5413248"/>
-            <a:ext cx="1664208" cy="292608"/>
+            <a:off x="2331719" y="5340096"/>
+            <a:ext cx="1709927" cy="365760"/>
           </a:xfrm>
           <a:prstGeom prst="rect">
             <a:avLst/>
@@ -4106,14 +4157,14 @@
           <a:p>
             <a:pPr algn="l"/>
             <a:r>
-              <a:rPr sz="1400" b="1">
+              <a:rPr sz="1200" b="1">
                 <a:solidFill>
                   <a:srgbClr val="8B1A2B"/>
                 </a:solidFill>
                 <a:latin typeface="Microsoft YaHei"/>
                 <a:ea typeface="Microsoft YaHei"/>
               </a:rPr>
-              <a:t>跃迁轴：LLM → WM（物理世界…</a:t>
+              <a:t>WM（物理世界模型）</a:t>
             </a:r>
           </a:p>
         </p:txBody>
@@ -4126,8 +4177,8 @@
         </p:nvSpPr>
         <p:spPr>
           <a:xfrm>
-            <a:off x="4233672" y="4910328"/>
-            <a:ext cx="1847088" cy="868680"/>
+            <a:off x="4206238" y="4809744"/>
+            <a:ext cx="1874519" cy="960120"/>
           </a:xfrm>
           <a:prstGeom prst="rect">
             <a:avLst/>
@@ -4171,8 +4222,8 @@
         </p:nvSpPr>
         <p:spPr>
           <a:xfrm>
-            <a:off x="4343400" y="4965192"/>
-            <a:ext cx="1664208" cy="201168"/>
+            <a:off x="4297678" y="4864608"/>
+            <a:ext cx="1709927" cy="201168"/>
           </a:xfrm>
           <a:prstGeom prst="rect">
             <a:avLst/>
@@ -4194,7 +4245,7 @@
                 <a:latin typeface="Microsoft YaHei"/>
                 <a:ea typeface="Microsoft YaHei"/>
               </a:rPr>
-              <a:t>大尺度物理世界模型：不…</a:t>
+              <a:t>不止智驾与具身</a:t>
             </a:r>
           </a:p>
         </p:txBody>
@@ -4207,8 +4258,8 @@
         </p:nvSpPr>
         <p:spPr>
           <a:xfrm>
-            <a:off x="4343400" y="5166360"/>
-            <a:ext cx="1664208" cy="237744"/>
+            <a:off x="4297678" y="5065776"/>
+            <a:ext cx="1709927" cy="256032"/>
           </a:xfrm>
           <a:prstGeom prst="rect">
             <a:avLst/>
@@ -4230,7 +4281,7 @@
                 <a:latin typeface="Microsoft YaHei"/>
                 <a:ea typeface="Microsoft YaHei"/>
               </a:rPr>
-              <a:t>适用系统特征：可观测状态、时空…</a:t>
+              <a:t>演讲口径</a:t>
             </a:r>
           </a:p>
         </p:txBody>
@@ -4243,8 +4294,8 @@
         </p:nvSpPr>
         <p:spPr>
           <a:xfrm>
-            <a:off x="4343400" y="5413248"/>
-            <a:ext cx="1664208" cy="292608"/>
+            <a:off x="4297678" y="5340096"/>
+            <a:ext cx="1709927" cy="365760"/>
           </a:xfrm>
           <a:prstGeom prst="rect">
             <a:avLst/>
@@ -4259,7 +4310,7 @@
           <a:p>
             <a:pPr algn="l"/>
             <a:r>
-              <a:rPr sz="1400" b="1">
+              <a:rPr sz="1200" b="1">
                 <a:solidFill>
                   <a:srgbClr val="8B1A2B"/>
                 </a:solidFill>
@@ -4279,8 +4330,8 @@
         </p:nvSpPr>
         <p:spPr>
           <a:xfrm>
-            <a:off x="6190488" y="4910328"/>
-            <a:ext cx="1847088" cy="868680"/>
+            <a:off x="6172197" y="4809744"/>
+            <a:ext cx="1874519" cy="960120"/>
           </a:xfrm>
           <a:prstGeom prst="rect">
             <a:avLst/>
@@ -4324,8 +4375,8 @@
         </p:nvSpPr>
         <p:spPr>
           <a:xfrm>
-            <a:off x="6300216" y="4965192"/>
-            <a:ext cx="1664208" cy="201168"/>
+            <a:off x="6263637" y="4864608"/>
+            <a:ext cx="1709927" cy="201168"/>
           </a:xfrm>
           <a:prstGeom prst="rect">
             <a:avLst/>
@@ -4347,7 +4398,7 @@
                 <a:latin typeface="Microsoft YaHei"/>
                 <a:ea typeface="Microsoft YaHei"/>
               </a:rPr>
-              <a:t>卫星数据：AI 与物理…</a:t>
+              <a:t>反馈形态</a:t>
             </a:r>
           </a:p>
         </p:txBody>
@@ -4360,8 +4411,8 @@
         </p:nvSpPr>
         <p:spPr>
           <a:xfrm>
-            <a:off x="6300216" y="5166360"/>
-            <a:ext cx="1664208" cy="237744"/>
+            <a:off x="6263637" y="5065776"/>
+            <a:ext cx="1709927" cy="256032"/>
           </a:xfrm>
           <a:prstGeom prst="rect">
             <a:avLst/>
@@ -4383,7 +4434,7 @@
                 <a:latin typeface="Microsoft YaHei"/>
                 <a:ea typeface="Microsoft YaHei"/>
               </a:rPr>
-              <a:t>对照 RLHF：人类偏好对齐引…</a:t>
+              <a:t>演讲口径</a:t>
             </a:r>
           </a:p>
         </p:txBody>
@@ -4396,8 +4447,8 @@
         </p:nvSpPr>
         <p:spPr>
           <a:xfrm>
-            <a:off x="6300216" y="5413248"/>
-            <a:ext cx="1664208" cy="292608"/>
+            <a:off x="6263637" y="5340096"/>
+            <a:ext cx="1709927" cy="365760"/>
           </a:xfrm>
           <a:prstGeom prst="rect">
             <a:avLst/>
@@ -4412,14 +4463,14 @@
           <a:p>
             <a:pPr algn="l"/>
             <a:r>
-              <a:rPr sz="1400" b="1">
+              <a:rPr sz="1200" b="1">
                 <a:solidFill>
                   <a:srgbClr val="8B1A2B"/>
                 </a:solidFill>
                 <a:latin typeface="Microsoft YaHei"/>
                 <a:ea typeface="Microsoft YaHei"/>
               </a:rPr>
-              <a:t>反馈形态：预测态 vs EO 观测…</a:t>
+              <a:t>预测态 vs EO 观测态的 delta</a:t>
             </a:r>
           </a:p>
         </p:txBody>
@@ -4432,8 +4483,8 @@
         </p:nvSpPr>
         <p:spPr>
           <a:xfrm>
-            <a:off x="8147304" y="4910328"/>
-            <a:ext cx="1847088" cy="868680"/>
+            <a:off x="8138156" y="4809744"/>
+            <a:ext cx="1874519" cy="960120"/>
           </a:xfrm>
           <a:prstGeom prst="rect">
             <a:avLst/>
@@ -4477,8 +4528,8 @@
         </p:nvSpPr>
         <p:spPr>
           <a:xfrm>
-            <a:off x="8257032" y="4965192"/>
-            <a:ext cx="1664208" cy="201168"/>
+            <a:off x="8229596" y="4864608"/>
+            <a:ext cx="1709927" cy="201168"/>
           </a:xfrm>
           <a:prstGeom prst="rect">
             <a:avLst/>
@@ -4500,7 +4551,7 @@
                 <a:latin typeface="Microsoft YaHei"/>
                 <a:ea typeface="Microsoft YaHei"/>
               </a:rPr>
-              <a:t>卫星数据规模指数增长：…</a:t>
+              <a:t>2025</a:t>
             </a:r>
           </a:p>
         </p:txBody>
@@ -4513,8 +4564,8 @@
         </p:nvSpPr>
         <p:spPr>
           <a:xfrm>
-            <a:off x="8257032" y="5166360"/>
-            <a:ext cx="1664208" cy="237744"/>
+            <a:off x="8229596" y="5065776"/>
+            <a:ext cx="1709927" cy="256032"/>
           </a:xfrm>
           <a:prstGeom prst="rect">
             <a:avLst/>
@@ -4536,7 +4587,7 @@
                 <a:latin typeface="Microsoft YaHei"/>
                 <a:ea typeface="Microsoft YaHei"/>
               </a:rPr>
-              <a:t>2030：~300 PB/年（…</a:t>
+              <a:t>演讲口径</a:t>
             </a:r>
           </a:p>
         </p:txBody>
@@ -4549,8 +4600,8 @@
         </p:nvSpPr>
         <p:spPr>
           <a:xfrm>
-            <a:off x="8257032" y="5413248"/>
-            <a:ext cx="1664208" cy="292608"/>
+            <a:off x="8229596" y="5340096"/>
+            <a:ext cx="1709927" cy="365760"/>
           </a:xfrm>
           <a:prstGeom prst="rect">
             <a:avLst/>
@@ -4565,14 +4616,14 @@
           <a:p>
             <a:pPr algn="l"/>
             <a:r>
-              <a:rPr sz="1400" b="1">
+              <a:rPr sz="1200" b="1">
                 <a:solidFill>
                   <a:srgbClr val="8B1A2B"/>
                 </a:solidFill>
                 <a:latin typeface="Microsoft YaHei"/>
                 <a:ea typeface="Microsoft YaHei"/>
               </a:rPr>
-              <a:t>2025：~10 PB/年</a:t>
+              <a:t>~10 PB/年</a:t>
             </a:r>
           </a:p>
         </p:txBody>
@@ -4585,8 +4636,8 @@
         </p:nvSpPr>
         <p:spPr>
           <a:xfrm>
-            <a:off x="10104120" y="4910328"/>
-            <a:ext cx="1847088" cy="868680"/>
+            <a:off x="10104115" y="4809744"/>
+            <a:ext cx="1874519" cy="960120"/>
           </a:xfrm>
           <a:prstGeom prst="rect">
             <a:avLst/>
@@ -4630,8 +4681,8 @@
         </p:nvSpPr>
         <p:spPr>
           <a:xfrm>
-            <a:off x="10213848" y="4965192"/>
-            <a:ext cx="1664208" cy="201168"/>
+            <a:off x="10195555" y="4864608"/>
+            <a:ext cx="1709927" cy="201168"/>
           </a:xfrm>
           <a:prstGeom prst="rect">
             <a:avLst/>
@@ -4653,7 +4704,7 @@
                 <a:latin typeface="Microsoft YaHei"/>
                 <a:ea typeface="Microsoft YaHei"/>
               </a:rPr>
-              <a:t>洞察时空基于 ACK …</a:t>
+              <a:t>2030</a:t>
             </a:r>
           </a:p>
         </p:txBody>
@@ -4666,8 +4717,8 @@
         </p:nvSpPr>
         <p:spPr>
           <a:xfrm>
-            <a:off x="10213848" y="5166360"/>
-            <a:ext cx="1664208" cy="237744"/>
+            <a:off x="10195555" y="5065776"/>
+            <a:ext cx="1709927" cy="256032"/>
           </a:xfrm>
           <a:prstGeom prst="rect">
             <a:avLst/>
@@ -4689,7 +4740,7 @@
                 <a:latin typeface="Microsoft YaHei"/>
                 <a:ea typeface="Microsoft YaHei"/>
               </a:rPr>
-              <a:t>特色存储：Neo4j + Mi…</a:t>
+              <a:t>演讲口径</a:t>
             </a:r>
           </a:p>
         </p:txBody>
@@ -4702,8 +4753,8 @@
         </p:nvSpPr>
         <p:spPr>
           <a:xfrm>
-            <a:off x="10213848" y="5413248"/>
-            <a:ext cx="1664208" cy="292608"/>
+            <a:off x="10195555" y="5340096"/>
+            <a:ext cx="1709927" cy="365760"/>
           </a:xfrm>
           <a:prstGeom prst="rect">
             <a:avLst/>
@@ -4718,14 +4769,14 @@
           <a:p>
             <a:pPr algn="l"/>
             <a:r>
-              <a:rPr sz="1400" b="1">
+              <a:rPr sz="1200" b="1">
                 <a:solidFill>
                   <a:srgbClr val="8B1A2B"/>
                 </a:solidFill>
                 <a:latin typeface="Microsoft YaHei"/>
                 <a:ea typeface="Microsoft YaHei"/>
               </a:rPr>
-              <a:t>特色存储：Neo4j + Milv…</a:t>
+              <a:t>~300 PB/年（约 30x）</a:t>
             </a:r>
           </a:p>
         </p:txBody>
@@ -4738,8 +4789,8 @@
         </p:nvSpPr>
         <p:spPr>
           <a:xfrm>
-            <a:off x="0" y="5989320"/>
-            <a:ext cx="12191695" cy="868680"/>
+            <a:off x="0" y="5870448"/>
+            <a:ext cx="12191695" cy="987552"/>
           </a:xfrm>
           <a:prstGeom prst="rect">
             <a:avLst/>
@@ -4781,8 +4832,8 @@
         </p:nvSpPr>
         <p:spPr>
           <a:xfrm>
-            <a:off x="365760" y="6080760"/>
-            <a:ext cx="11430000" cy="256032"/>
+            <a:off x="320040" y="5943600"/>
+            <a:ext cx="11521440" cy="502920"/>
           </a:xfrm>
           <a:prstGeom prst="rect">
             <a:avLst/>
@@ -4797,14 +4848,14 @@
           <a:p>
             <a:pPr algn="l"/>
             <a:r>
-              <a:rPr sz="1200" b="1">
+              <a:rPr sz="1100" b="1">
                 <a:solidFill>
                   <a:srgbClr val="1A1A1A"/>
                 </a:solidFill>
                 <a:latin typeface="Microsoft YaHei"/>
                 <a:ea typeface="Microsoft YaHei"/>
               </a:rPr>
-              <a:t>可落地动作：时空智能是「数据飞轮 + 世界模型 + 行业决策」组合，HCS 要同时补 EO 数据面、异构训推与行业 SLA 方案包。；把卫星观测做成物理世界对齐反馈，是区别于通用 LLM 平台的差异化能力。</a:t>
+              <a:t>可落地动作：时空智能是「数据飞轮 + 世界模型 + 行业决策」组合，HCS 要同时补 EO 数据面、异构训推与行业 SLA 方案包；把卫星观测做成物理世界对齐反馈，是区别于通用 LLM 平台的差异化能力；开放面上 API + MCP + Agent 三通道，便于政企生态集成，HCS 应同步提供 MCP 网关与专属云落地形态。</a:t>
             </a:r>
           </a:p>
         </p:txBody>
@@ -4817,8 +4868,8 @@
         </p:nvSpPr>
         <p:spPr>
           <a:xfrm>
-            <a:off x="365760" y="6373368"/>
-            <a:ext cx="11430000" cy="256032"/>
+            <a:off x="320040" y="6437376"/>
+            <a:ext cx="11521440" cy="256032"/>
           </a:xfrm>
           <a:prstGeom prst="rect">
             <a:avLst/>
@@ -4833,7 +4884,7 @@
           <a:p>
             <a:pPr algn="l"/>
             <a:r>
-              <a:rPr sz="1000" b="0">
+              <a:rPr sz="900" b="0">
                 <a:solidFill>
                   <a:srgbClr val="6B6B6B"/>
                 </a:solidFill>
@@ -5075,7 +5126,7 @@
         <p:spPr>
           <a:xfrm>
             <a:off x="429768" y="1143000"/>
-            <a:ext cx="3496970" cy="292608"/>
+            <a:ext cx="3496970" cy="384048"/>
           </a:xfrm>
           <a:prstGeom prst="rect">
             <a:avLst/>
@@ -5118,7 +5169,7 @@
         </p:blipFill>
         <p:spPr>
           <a:xfrm>
-            <a:off x="429768" y="1928092"/>
+            <a:off x="429768" y="1946380"/>
             <a:ext cx="3496970" cy="2965239"/>
           </a:xfrm>
           <a:prstGeom prst="rect">
@@ -5216,7 +5267,7 @@
         <p:spPr>
           <a:xfrm>
             <a:off x="4347362" y="1143000"/>
-            <a:ext cx="3496970" cy="292608"/>
+            <a:ext cx="3496970" cy="384048"/>
           </a:xfrm>
           <a:prstGeom prst="rect">
             <a:avLst/>
@@ -5238,7 +5289,7 @@
                 <a:latin typeface="Microsoft YaHei"/>
                 <a:ea typeface="Microsoft YaHei"/>
               </a:rPr>
-              <a:t>跃迁轴：LLM → WM（物理世界…</a:t>
+              <a:t>跃迁轴：LLM → WM（物理世界模型）</a:t>
             </a:r>
           </a:p>
         </p:txBody>
@@ -5259,7 +5310,7 @@
         </p:blipFill>
         <p:spPr>
           <a:xfrm>
-            <a:off x="4347362" y="1928092"/>
+            <a:off x="4347362" y="1946380"/>
             <a:ext cx="3496970" cy="2965239"/>
           </a:xfrm>
           <a:prstGeom prst="rect">
@@ -5357,7 +5408,7 @@
         <p:spPr>
           <a:xfrm>
             <a:off x="8264956" y="1143000"/>
-            <a:ext cx="3496970" cy="292608"/>
+            <a:ext cx="3496970" cy="384048"/>
           </a:xfrm>
           <a:prstGeom prst="rect">
             <a:avLst/>
@@ -5400,7 +5451,7 @@
         </p:blipFill>
         <p:spPr>
           <a:xfrm>
-            <a:off x="8264956" y="1928092"/>
+            <a:off x="8264956" y="1946380"/>
             <a:ext cx="3496970" cy="2965239"/>
           </a:xfrm>
           <a:prstGeom prst="rect">

--- a/yunqi-2026-agenda-201/docs/洞察一页-07-时空智能 Infra：感-算-决一体化.pptx
+++ b/yunqi-2026-agenda-201/docs/洞察一页-07-时空智能 Infra：感-算-决一体化.pptx
@@ -3242,7 +3242,7 @@
                 <a:latin typeface="Microsoft YaHei"/>
                 <a:ea typeface="Microsoft YaHei"/>
               </a:rPr>
-              <a:t>洞察：时空智能是「数据飞轮 + 世界模型 + 行业决策」组合，HCS 要同时补 EO 数据面、异构训推与行业 SLA 方案包。</a:t>
+              <a:t>洞察：时空智能是「数据飞轮 + 世界模型 + 行业决策」组合， 要同时补 EO 数据面、异构训推与行业 SLA 方案包。</a:t>
             </a:r>
           </a:p>
         </p:txBody>
@@ -3323,7 +3323,7 @@
                 <a:latin typeface="Microsoft YaHei"/>
                 <a:ea typeface="Microsoft YaHei"/>
               </a:rPr>
-              <a:t>一句话判断：洞察时空提出时空智能 Infra 的「感-算-决」一体化架构：从 LLM「会说话」跃迁到物理世界模型「懂世界」，以卫星/多源 EO 数据作为 AI 与物理世界对齐的关键反馈入口。基于 ACK 云原生 AI 套件构建卫星任务调度、时空数据湖、算法与预测决策平台，落地气象、新能源功率与电力现货等行业场景，并以 API/MCP/Agent 开放产业生态。</a:t>
+              <a:t>一句话判断：洞察时空提出时空智能 Infra 的「感-算-决」一体化架构：从 LLM「会说话」跃迁到物理世界模型「懂世界」，以卫星/多源 EO 数据作为 AI 与物理世界对齐的关键反馈入口。</a:t>
             </a:r>
           </a:p>
         </p:txBody>
@@ -3444,7 +3444,7 @@
                 <a:latin typeface="Microsoft YaHei"/>
                 <a:ea typeface="Microsoft YaHei"/>
               </a:rPr>
-              <a:t>HCS 若服务智慧城市/能源/应急类客户，需在容器 AI 平台之上显式规划「时空数据接入 → 训练推理 → 决策服务」闭环产品线</a:t>
+              <a:t>若服务智慧城市/能源/应急类客户，需在容器 AI 平台之上显式规划「时空数据接入 → 训练推理 → 决策服务」闭环产品线</a:t>
             </a:r>
           </a:p>
           <a:p>
@@ -3599,7 +3599,7 @@
                 <a:latin typeface="Microsoft YaHei"/>
                 <a:ea typeface="Microsoft YaHei"/>
               </a:rPr>
-              <a:t>HCS AI 平台规划应区分「语言智能」与「世界模型/物理智能」两套工作负载画像：后者强调时空演化仿真、因果约束与长周期推演算力</a:t>
+              <a:t>AI 平台规划应区分「语言智能」与「世界模型/物理智能」两套工作负载画像：后者强调时空演化仿真、因果约束与长周期推演算力</a:t>
             </a:r>
           </a:p>
           <a:p>
@@ -3939,7 +3939,7 @@
                 <a:latin typeface="Microsoft YaHei"/>
                 <a:ea typeface="Microsoft YaHei"/>
               </a:rPr>
-              <a:t>架构口号</a:t>
+              <a:t>台风路径误差 ↓</a:t>
             </a:r>
           </a:p>
         </p:txBody>
@@ -3975,7 +3975,7 @@
                 <a:latin typeface="Microsoft YaHei"/>
                 <a:ea typeface="Microsoft YaHei"/>
               </a:rPr>
-              <a:t>演讲口径</a:t>
+              <a:t>行业落地</a:t>
             </a:r>
           </a:p>
         </p:txBody>
@@ -4011,7 +4011,7 @@
                 <a:latin typeface="Microsoft YaHei"/>
                 <a:ea typeface="Microsoft YaHei"/>
               </a:rPr>
-              <a:t>感 · 算 · 决一体化</a:t>
+              <a:t>约 20–30%</a:t>
             </a:r>
           </a:p>
         </p:txBody>
@@ -4092,7 +4092,7 @@
                 <a:latin typeface="Microsoft YaHei"/>
                 <a:ea typeface="Microsoft YaHei"/>
               </a:rPr>
-              <a:t>跃迁轴</a:t>
+              <a:t>2030</a:t>
             </a:r>
           </a:p>
         </p:txBody>
@@ -4128,7 +4128,7 @@
                 <a:latin typeface="Microsoft YaHei"/>
                 <a:ea typeface="Microsoft YaHei"/>
               </a:rPr>
-              <a:t>跃迁轴：LLM</a:t>
+              <a:t>卫星数据规模指数增长</a:t>
             </a:r>
           </a:p>
         </p:txBody>
@@ -4164,7 +4164,7 @@
                 <a:latin typeface="Microsoft YaHei"/>
                 <a:ea typeface="Microsoft YaHei"/>
               </a:rPr>
-              <a:t>WM（物理世界模型）</a:t>
+              <a:t>~300 PB/年（约 30x）</a:t>
             </a:r>
           </a:p>
         </p:txBody>
@@ -4245,7 +4245,7 @@
                 <a:latin typeface="Microsoft YaHei"/>
                 <a:ea typeface="Microsoft YaHei"/>
               </a:rPr>
-              <a:t>不止智驾与具身</a:t>
+              <a:t>行业落地</a:t>
             </a:r>
           </a:p>
         </p:txBody>
@@ -4281,7 +4281,7 @@
                 <a:latin typeface="Microsoft YaHei"/>
                 <a:ea typeface="Microsoft YaHei"/>
               </a:rPr>
-              <a:t>演讲口径</a:t>
+              <a:t>关键能力</a:t>
             </a:r>
           </a:p>
         </p:txBody>
@@ -4317,7 +4317,7 @@
                 <a:latin typeface="Microsoft YaHei"/>
                 <a:ea typeface="Microsoft YaHei"/>
               </a:rPr>
-              <a:t>13+ 垂直行业域示意覆盖</a:t>
+              <a:t>现货方向准确率 &gt;78%；风险识别 ~80%</a:t>
             </a:r>
           </a:p>
         </p:txBody>
@@ -4398,7 +4398,7 @@
                 <a:latin typeface="Microsoft YaHei"/>
                 <a:ea typeface="Microsoft YaHei"/>
               </a:rPr>
-              <a:t>反馈形态</a:t>
+              <a:t>从 LLM 到物理世界模型（WM）的能力跃迁</a:t>
             </a:r>
           </a:p>
         </p:txBody>
@@ -4434,7 +4434,7 @@
                 <a:latin typeface="Microsoft YaHei"/>
                 <a:ea typeface="Microsoft YaHei"/>
               </a:rPr>
-              <a:t>演讲口径</a:t>
+              <a:t>跃迁轴：LLM</a:t>
             </a:r>
           </a:p>
         </p:txBody>
@@ -4470,7 +4470,7 @@
                 <a:latin typeface="Microsoft YaHei"/>
                 <a:ea typeface="Microsoft YaHei"/>
               </a:rPr>
-              <a:t>预测态 vs EO 观测态的 delta</a:t>
+              <a:t>WM（物理世界模型）</a:t>
             </a:r>
           </a:p>
         </p:txBody>
@@ -4551,7 +4551,7 @@
                 <a:latin typeface="Microsoft YaHei"/>
                 <a:ea typeface="Microsoft YaHei"/>
               </a:rPr>
-              <a:t>2025</a:t>
+              <a:t>不止智驾与具身</a:t>
             </a:r>
           </a:p>
         </p:txBody>
@@ -4587,7 +4587,7 @@
                 <a:latin typeface="Microsoft YaHei"/>
                 <a:ea typeface="Microsoft YaHei"/>
               </a:rPr>
-              <a:t>演讲口径</a:t>
+              <a:t>关键能力</a:t>
             </a:r>
           </a:p>
         </p:txBody>
@@ -4623,7 +4623,7 @@
                 <a:latin typeface="Microsoft YaHei"/>
                 <a:ea typeface="Microsoft YaHei"/>
               </a:rPr>
-              <a:t>~10 PB/年</a:t>
+              <a:t>13+ 垂直行业域示意覆盖</a:t>
             </a:r>
           </a:p>
         </p:txBody>
@@ -4704,7 +4704,7 @@
                 <a:latin typeface="Microsoft YaHei"/>
                 <a:ea typeface="Microsoft YaHei"/>
               </a:rPr>
-              <a:t>2030</a:t>
+              <a:t>2025</a:t>
             </a:r>
           </a:p>
         </p:txBody>
@@ -4740,7 +4740,7 @@
                 <a:latin typeface="Microsoft YaHei"/>
                 <a:ea typeface="Microsoft YaHei"/>
               </a:rPr>
-              <a:t>演讲口径</a:t>
+              <a:t>卫星数据规模指数增长</a:t>
             </a:r>
           </a:p>
         </p:txBody>
@@ -4776,7 +4776,7 @@
                 <a:latin typeface="Microsoft YaHei"/>
                 <a:ea typeface="Microsoft YaHei"/>
               </a:rPr>
-              <a:t>~300 PB/年（约 30x）</a:t>
+              <a:t>~10 PB/年</a:t>
             </a:r>
           </a:p>
         </p:txBody>
@@ -4855,7 +4855,7 @@
                 <a:latin typeface="Microsoft YaHei"/>
                 <a:ea typeface="Microsoft YaHei"/>
               </a:rPr>
-              <a:t>可落地动作：时空智能是「数据飞轮 + 世界模型 + 行业决策」组合，HCS 要同时补 EO 数据面、异构训推与行业 SLA 方案包；把卫星观测做成物理世界对齐反馈，是区别于通用 LLM 平台的差异化能力；开放面上 API + MCP + Agent 三通道，便于政企生态集成，HCS 应同步提供 MCP 网关与专属云落地形态。</a:t>
+              <a:t>启示要点：时空智能是「数据飞轮 + 世界模型 + 行业决策」组合， 要同时补 EO 数据面、异构训推与行业 SLA 方案包；把卫星观测做成物理世界对齐反馈，是区别于通用 LLM 平台的差异化能力；开放面上 API + MCP + Agent 三通道，便于政企生态集成， 应同步提供 MCP 网关与专属云落地形态。</a:t>
             </a:r>
           </a:p>
         </p:txBody>
@@ -4891,7 +4891,7 @@
                 <a:latin typeface="Microsoft YaHei"/>
                 <a:ea typeface="Microsoft YaHei"/>
               </a:rPr>
-              <a:t>来源：https://yunqi.aliyun.com/2026/session?agendaId=201 · Talk 07 沈健  ·  视角：HCS 技术规划</a:t>
+              <a:t>来源：https://yunqi.aliyun.com/2026/session?agendaId=201 · Talk 07 沈健</a:t>
             </a:r>
           </a:p>
         </p:txBody>
